--- a/AMT_results.pptx
+++ b/AMT_results.pptx
@@ -17610,7 +17610,12 @@
             <p:ph type="body" idx="1"/>
           </p:nvPr>
         </p:nvSpPr>
-        <p:spPr/>
+        <p:spPr>
+          <a:xfrm>
+            <a:off x="1090304" y="1651075"/>
+            <a:ext cx="2334000" cy="3122400"/>
+          </a:xfrm>
+        </p:spPr>
         <p:txBody>
           <a:bodyPr/>
           <a:lstStyle/>
@@ -17638,7 +17643,12 @@
             <p:ph type="body" idx="2"/>
           </p:nvPr>
         </p:nvSpPr>
-        <p:spPr/>
+        <p:spPr>
+          <a:xfrm>
+            <a:off x="3543966" y="1651075"/>
+            <a:ext cx="2334000" cy="3122400"/>
+          </a:xfrm>
+        </p:spPr>
         <p:txBody>
           <a:bodyPr/>
           <a:lstStyle/>
@@ -17671,7 +17681,12 @@
             <p:ph type="body" idx="3"/>
           </p:nvPr>
         </p:nvSpPr>
-        <p:spPr/>
+        <p:spPr>
+          <a:xfrm>
+            <a:off x="5997627" y="1651075"/>
+            <a:ext cx="2334000" cy="3122400"/>
+          </a:xfrm>
+        </p:spPr>
         <p:txBody>
           <a:bodyPr/>
           <a:lstStyle/>
@@ -17723,10 +17738,39 @@
       </p:sp>
       <p:pic>
         <p:nvPicPr>
-          <p:cNvPr id="16" name="Imagen 15" descr="Icono&#10;&#10;Descripción generada automáticamente">
+          <p:cNvPr id="8" name="Imagen 7" descr="Gráfico, Gráfico de barras&#10;&#10;Descripción generada automáticamente">
             <a:extLst>
               <a:ext uri="{FF2B5EF4-FFF2-40B4-BE49-F238E27FC236}">
-                <a16:creationId xmlns:a16="http://schemas.microsoft.com/office/drawing/2014/main" id="{86D70E68-9BB2-3000-B53F-5DA024C3DB12}"/>
+                <a16:creationId xmlns:a16="http://schemas.microsoft.com/office/drawing/2014/main" id="{C5129A6E-6CE2-B327-2773-49F0259BF62B}"/>
+              </a:ext>
+            </a:extLst>
+          </p:cNvPr>
+          <p:cNvPicPr>
+            <a:picLocks noChangeAspect="1"/>
+          </p:cNvPicPr>
+          <p:nvPr/>
+        </p:nvPicPr>
+        <p:blipFill rotWithShape="1">
+          <a:blip r:embed="rId2"/>
+          <a:srcRect b="82431"/>
+          <a:stretch/>
+        </p:blipFill>
+        <p:spPr>
+          <a:xfrm>
+            <a:off x="1377248" y="2600188"/>
+            <a:ext cx="1781587" cy="1085121"/>
+          </a:xfrm>
+          <a:prstGeom prst="rect">
+            <a:avLst/>
+          </a:prstGeom>
+        </p:spPr>
+      </p:pic>
+      <p:pic>
+        <p:nvPicPr>
+          <p:cNvPr id="10" name="Imagen 9" descr="Gráfico, Gráfico de dispersión&#10;&#10;Descripción generada automáticamente">
+            <a:extLst>
+              <a:ext uri="{FF2B5EF4-FFF2-40B4-BE49-F238E27FC236}">
+                <a16:creationId xmlns:a16="http://schemas.microsoft.com/office/drawing/2014/main" id="{045C1371-FE2C-E3E8-DD36-DE9AB3AC0EA1}"/>
               </a:ext>
             </a:extLst>
           </p:cNvPr>
@@ -17736,15 +17780,15 @@
           <p:nvPr/>
         </p:nvPicPr>
         <p:blipFill>
-          <a:blip r:embed="rId2"/>
+          <a:blip r:embed="rId3"/>
           <a:stretch>
             <a:fillRect/>
           </a:stretch>
         </p:blipFill>
         <p:spPr>
           <a:xfrm>
-            <a:off x="1788678" y="2763981"/>
-            <a:ext cx="1519144" cy="1519144"/>
+            <a:off x="5831302" y="2600188"/>
+            <a:ext cx="3127986" cy="939648"/>
           </a:xfrm>
           <a:prstGeom prst="rect">
             <a:avLst/>
@@ -17753,10 +17797,10 @@
       </p:pic>
       <p:pic>
         <p:nvPicPr>
-          <p:cNvPr id="17" name="Imagen 16" descr="Icono&#10;&#10;Descripción generada automáticamente">
+          <p:cNvPr id="12" name="Imagen 11" descr="Gráfico, Gráfico de líneas&#10;&#10;Descripción generada automáticamente">
             <a:extLst>
               <a:ext uri="{FF2B5EF4-FFF2-40B4-BE49-F238E27FC236}">
-                <a16:creationId xmlns:a16="http://schemas.microsoft.com/office/drawing/2014/main" id="{BDE444D2-D52F-6343-7041-9024B6A85B7D}"/>
+                <a16:creationId xmlns:a16="http://schemas.microsoft.com/office/drawing/2014/main" id="{E551ED03-4569-A05D-745E-306B997E5C64}"/>
               </a:ext>
             </a:extLst>
           </p:cNvPr>
@@ -17766,15 +17810,15 @@
           <p:nvPr/>
         </p:nvPicPr>
         <p:blipFill>
-          <a:blip r:embed="rId2"/>
+          <a:blip r:embed="rId4"/>
           <a:stretch>
             <a:fillRect/>
           </a:stretch>
         </p:blipFill>
         <p:spPr>
           <a:xfrm>
-            <a:off x="4242340" y="2763981"/>
-            <a:ext cx="1519144" cy="1519144"/>
+            <a:off x="3424304" y="2600188"/>
+            <a:ext cx="2334000" cy="701135"/>
           </a:xfrm>
           <a:prstGeom prst="rect">
             <a:avLst/>
@@ -17783,34 +17827,203 @@
       </p:pic>
       <p:pic>
         <p:nvPicPr>
-          <p:cNvPr id="18" name="Imagen 17" descr="Icono&#10;&#10;Descripción generada automáticamente">
+          <p:cNvPr id="1026" name="Picture 2" descr="Project Jupyter - Wikipedia">
             <a:extLst>
               <a:ext uri="{FF2B5EF4-FFF2-40B4-BE49-F238E27FC236}">
-                <a16:creationId xmlns:a16="http://schemas.microsoft.com/office/drawing/2014/main" id="{A0991CE5-EFC8-5E6A-E151-76B6858BDD4F}"/>
+                <a16:creationId xmlns:a16="http://schemas.microsoft.com/office/drawing/2014/main" id="{B67728A5-4670-AA17-63BA-E0DFE1A1E6B5}"/>
               </a:ext>
             </a:extLst>
           </p:cNvPr>
           <p:cNvPicPr>
-            <a:picLocks noChangeAspect="1"/>
+            <a:picLocks noChangeAspect="1" noChangeArrowheads="1"/>
           </p:cNvPicPr>
           <p:nvPr/>
         </p:nvPicPr>
         <p:blipFill>
-          <a:blip r:embed="rId2"/>
+          <a:blip r:embed="rId5">
+            <a:extLst>
+              <a:ext uri="{28A0092B-C50C-407E-A947-70E740481C1C}">
+                <a14:useLocalDpi xmlns:a14="http://schemas.microsoft.com/office/drawing/2010/main" val="0"/>
+              </a:ext>
+            </a:extLst>
+          </a:blip>
+          <a:srcRect/>
           <a:stretch>
             <a:fillRect/>
           </a:stretch>
         </p:blipFill>
-        <p:spPr>
-          <a:xfrm>
-            <a:off x="6696001" y="2763981"/>
-            <a:ext cx="1519144" cy="1519144"/>
+        <p:spPr bwMode="auto">
+          <a:xfrm>
+            <a:off x="1902405" y="3805181"/>
+            <a:ext cx="517772" cy="600208"/>
           </a:xfrm>
           <a:prstGeom prst="rect">
             <a:avLst/>
           </a:prstGeom>
+          <a:noFill/>
+          <a:extLst>
+            <a:ext uri="{909E8E84-426E-40DD-AFC4-6F175D3DCCD1}">
+              <a14:hiddenFill xmlns:a14="http://schemas.microsoft.com/office/drawing/2010/main">
+                <a:solidFill>
+                  <a:srgbClr val="FFFFFF"/>
+                </a:solidFill>
+              </a14:hiddenFill>
+            </a:ext>
+          </a:extLst>
         </p:spPr>
       </p:pic>
+      <p:pic>
+        <p:nvPicPr>
+          <p:cNvPr id="15" name="Picture 2" descr="Project Jupyter - Wikipedia">
+            <a:extLst>
+              <a:ext uri="{FF2B5EF4-FFF2-40B4-BE49-F238E27FC236}">
+                <a16:creationId xmlns:a16="http://schemas.microsoft.com/office/drawing/2014/main" id="{1C44C37B-D4BF-0E62-CBBF-C4C15D7FE8E0}"/>
+              </a:ext>
+            </a:extLst>
+          </p:cNvPr>
+          <p:cNvPicPr>
+            <a:picLocks noChangeAspect="1" noChangeArrowheads="1"/>
+          </p:cNvPicPr>
+          <p:nvPr/>
+        </p:nvPicPr>
+        <p:blipFill>
+          <a:blip r:embed="rId5">
+            <a:extLst>
+              <a:ext uri="{28A0092B-C50C-407E-A947-70E740481C1C}">
+                <a14:useLocalDpi xmlns:a14="http://schemas.microsoft.com/office/drawing/2010/main" val="0"/>
+              </a:ext>
+            </a:extLst>
+          </a:blip>
+          <a:srcRect/>
+          <a:stretch>
+            <a:fillRect/>
+          </a:stretch>
+        </p:blipFill>
+        <p:spPr bwMode="auto">
+          <a:xfrm>
+            <a:off x="4313114" y="3805181"/>
+            <a:ext cx="517772" cy="600208"/>
+          </a:xfrm>
+          <a:prstGeom prst="rect">
+            <a:avLst/>
+          </a:prstGeom>
+          <a:noFill/>
+          <a:extLst>
+            <a:ext uri="{909E8E84-426E-40DD-AFC4-6F175D3DCCD1}">
+              <a14:hiddenFill xmlns:a14="http://schemas.microsoft.com/office/drawing/2010/main">
+                <a:solidFill>
+                  <a:srgbClr val="FFFFFF"/>
+                </a:solidFill>
+              </a14:hiddenFill>
+            </a:ext>
+          </a:extLst>
+        </p:spPr>
+      </p:pic>
+      <p:pic>
+        <p:nvPicPr>
+          <p:cNvPr id="19" name="Picture 2" descr="Project Jupyter - Wikipedia">
+            <a:extLst>
+              <a:ext uri="{FF2B5EF4-FFF2-40B4-BE49-F238E27FC236}">
+                <a16:creationId xmlns:a16="http://schemas.microsoft.com/office/drawing/2014/main" id="{FFEEE725-FB73-C375-FCAA-E8ACF17D6F8B}"/>
+              </a:ext>
+            </a:extLst>
+          </p:cNvPr>
+          <p:cNvPicPr>
+            <a:picLocks noChangeAspect="1" noChangeArrowheads="1"/>
+          </p:cNvPicPr>
+          <p:nvPr/>
+        </p:nvPicPr>
+        <p:blipFill>
+          <a:blip r:embed="rId5">
+            <a:extLst>
+              <a:ext uri="{28A0092B-C50C-407E-A947-70E740481C1C}">
+                <a14:useLocalDpi xmlns:a14="http://schemas.microsoft.com/office/drawing/2010/main" val="0"/>
+              </a:ext>
+            </a:extLst>
+          </a:blip>
+          <a:srcRect/>
+          <a:stretch>
+            <a:fillRect/>
+          </a:stretch>
+        </p:blipFill>
+        <p:spPr bwMode="auto">
+          <a:xfrm>
+            <a:off x="6982709" y="3805181"/>
+            <a:ext cx="517772" cy="600208"/>
+          </a:xfrm>
+          <a:prstGeom prst="rect">
+            <a:avLst/>
+          </a:prstGeom>
+          <a:noFill/>
+          <a:extLst>
+            <a:ext uri="{909E8E84-426E-40DD-AFC4-6F175D3DCCD1}">
+              <a14:hiddenFill xmlns:a14="http://schemas.microsoft.com/office/drawing/2010/main">
+                <a:solidFill>
+                  <a:srgbClr val="FFFFFF"/>
+                </a:solidFill>
+              </a14:hiddenFill>
+            </a:ext>
+          </a:extLst>
+        </p:spPr>
+      </p:pic>
+      <p:sp>
+        <p:nvSpPr>
+          <p:cNvPr id="20" name="Google Shape;141;p23">
+            <a:extLst>
+              <a:ext uri="{FF2B5EF4-FFF2-40B4-BE49-F238E27FC236}">
+                <a16:creationId xmlns:a16="http://schemas.microsoft.com/office/drawing/2014/main" id="{54D311B5-8B83-84DD-D19D-53541973EE57}"/>
+              </a:ext>
+            </a:extLst>
+          </p:cNvPr>
+          <p:cNvSpPr txBox="1"/>
+          <p:nvPr/>
+        </p:nvSpPr>
+        <p:spPr>
+          <a:xfrm>
+            <a:off x="2742900" y="4909246"/>
+            <a:ext cx="3658200" cy="228959"/>
+          </a:xfrm>
+          <a:prstGeom prst="rect">
+            <a:avLst/>
+          </a:prstGeom>
+          <a:noFill/>
+          <a:ln>
+            <a:noFill/>
+          </a:ln>
+        </p:spPr>
+        <p:txBody>
+          <a:bodyPr spcFirstLastPara="1" wrap="square" lIns="91425" tIns="91425" rIns="91425" bIns="91425" anchor="ctr" anchorCtr="0">
+            <a:noAutofit/>
+          </a:bodyPr>
+          <a:lstStyle/>
+          <a:p>
+            <a:pPr marL="0" lvl="0" indent="0" algn="ctr" rtl="0">
+              <a:spcBef>
+                <a:spcPts val="0"/>
+              </a:spcBef>
+              <a:spcAft>
+                <a:spcPts val="0"/>
+              </a:spcAft>
+              <a:buNone/>
+            </a:pPr>
+            <a:r>
+              <a:rPr lang="en" sz="1100" dirty="0">
+                <a:latin typeface="Quattrocento Sans"/>
+                <a:ea typeface="Quattrocento Sans"/>
+                <a:cs typeface="Quattrocento Sans"/>
+                <a:sym typeface="Quattrocento Sans"/>
+              </a:rPr>
+              <a:t>Visualización dinámica en notebooks.</a:t>
+            </a:r>
+            <a:endParaRPr sz="1100" dirty="0">
+              <a:latin typeface="Quattrocento Sans"/>
+              <a:ea typeface="Quattrocento Sans"/>
+              <a:cs typeface="Quattrocento Sans"/>
+              <a:sym typeface="Quattrocento Sans"/>
+            </a:endParaRPr>
+          </a:p>
+        </p:txBody>
+      </p:sp>
     </p:spTree>
     <p:extLst>
       <p:ext uri="{BB962C8B-B14F-4D97-AF65-F5344CB8AC3E}">

--- a/AMT_results.pptx
+++ b/AMT_results.pptx
@@ -11919,7 +11919,7 @@
                 <a:cs typeface="Quattrocento Sans"/>
                 <a:sym typeface="Quattrocento Sans"/>
               </a:rPr>
-              <a:t>05 de </a:t>
+              <a:t>08 de </a:t>
             </a:r>
             <a:r>
               <a:rPr lang="en" sz="1100" b="1" dirty="0">
@@ -12196,7 +12196,7 @@
               <a:buChar char="◉"/>
             </a:pPr>
             <a:r>
-              <a:rPr kumimoji="0" lang="es-ES" sz="2000" b="1" i="0" u="none" strike="noStrike" kern="0" cap="none" spc="0" normalizeH="0" baseline="0" noProof="0" dirty="0">
+              <a:rPr kumimoji="0" lang="es-ES" sz="1800" b="1" i="0" u="none" strike="noStrike" kern="0" cap="none" spc="0" normalizeH="0" baseline="0" noProof="0" dirty="0">
                 <a:ln>
                   <a:noFill/>
                 </a:ln>
@@ -12215,13 +12215,13 @@
               <a:t>POO y Entornos virtuales:</a:t>
             </a:r>
             <a:r>
-              <a:rPr lang="es-ES" sz="2000" b="1" dirty="0">
+              <a:rPr lang="es-ES" sz="1800" b="1" dirty="0">
                 <a:latin typeface="Quattrocento Sans" panose="020B0502050000020003" pitchFamily="34" charset="0"/>
               </a:rPr>
               <a:t> </a:t>
             </a:r>
             <a:r>
-              <a:rPr lang="es-ES" sz="2000" dirty="0"/>
+              <a:rPr lang="es-ES" sz="1800" dirty="0"/>
               <a:t>Diseño pensado en algunas oportunidades de mejora observadas.</a:t>
             </a:r>
           </a:p>
@@ -12240,7 +12240,7 @@
               <a:buChar char="◉"/>
             </a:pPr>
             <a:r>
-              <a:rPr kumimoji="0" lang="es-ES" sz="2000" b="1" i="0" u="none" strike="noStrike" kern="0" cap="none" spc="0" normalizeH="0" baseline="0" noProof="0" dirty="0">
+              <a:rPr kumimoji="0" lang="es-ES" sz="1800" b="1" i="0" u="none" strike="noStrike" kern="0" cap="none" spc="0" normalizeH="0" baseline="0" noProof="0" dirty="0">
                 <a:ln>
                   <a:noFill/>
                 </a:ln>
@@ -12259,12 +12259,20 @@
               <a:t>Infraestructura en la nube:</a:t>
             </a:r>
             <a:r>
-              <a:rPr lang="es-ES" sz="2000" b="1" dirty="0"/>
+              <a:rPr lang="es-ES" sz="1800" b="1" dirty="0"/>
               <a:t> </a:t>
             </a:r>
             <a:r>
-              <a:rPr lang="es-ES" sz="2000" dirty="0"/>
-              <a:t>Optimización pensada en infraestructura de la nube (cobro por procesos).</a:t>
+              <a:rPr lang="es-ES" sz="1800" dirty="0"/>
+              <a:t>Optimización y </a:t>
+            </a:r>
+            <a:r>
+              <a:rPr lang="es-ES" sz="1800" u="sng" dirty="0"/>
+              <a:t>refactorización</a:t>
+            </a:r>
+            <a:r>
+              <a:rPr lang="es-ES" sz="1800" dirty="0"/>
+              <a:t> pensada en infraestructura de la nube (cobro por procesos).</a:t>
             </a:r>
           </a:p>
           <a:p>
@@ -12282,7 +12290,7 @@
               <a:buChar char="◉"/>
             </a:pPr>
             <a:r>
-              <a:rPr kumimoji="0" lang="es-ES" sz="2000" b="1" i="0" u="none" strike="noStrike" kern="0" cap="none" spc="0" normalizeH="0" baseline="0" noProof="0" dirty="0">
+              <a:rPr kumimoji="0" lang="es-ES" sz="1800" b="1" i="0" u="none" strike="noStrike" kern="0" cap="none" spc="0" normalizeH="0" baseline="0" noProof="0" dirty="0">
                 <a:ln>
                   <a:noFill/>
                 </a:ln>
@@ -12301,14 +12309,54 @@
               <a:t>PEP8 y seguridad:</a:t>
             </a:r>
             <a:r>
-              <a:rPr lang="es-ES" sz="2000" b="1" dirty="0"/>
+              <a:rPr lang="es-ES" sz="1800" b="1" dirty="0"/>
               <a:t> </a:t>
             </a:r>
             <a:r>
-              <a:rPr lang="es-ES" sz="2000" dirty="0"/>
-              <a:t>Implementación usando buenas prácticas (internacionales).</a:t>
-            </a:r>
-            <a:endParaRPr lang="es-ES" b="1" dirty="0"/>
+              <a:rPr lang="es-ES" sz="1800" dirty="0"/>
+              <a:t>Implementación usando buenas prácticas (internacionales): </a:t>
+            </a:r>
+            <a:r>
+              <a:rPr lang="es-ES" sz="1800" u="sng" dirty="0" err="1"/>
+              <a:t>typing</a:t>
+            </a:r>
+            <a:r>
+              <a:rPr lang="es-ES" sz="1800" dirty="0"/>
+              <a:t>, </a:t>
+            </a:r>
+            <a:r>
+              <a:rPr lang="es-ES" sz="1800" u="sng" dirty="0" err="1"/>
+              <a:t>docstring</a:t>
+            </a:r>
+            <a:r>
+              <a:rPr lang="es-ES" sz="1800" dirty="0"/>
+              <a:t>, </a:t>
+            </a:r>
+            <a:r>
+              <a:rPr lang="es-ES" sz="1800" u="sng" dirty="0"/>
+              <a:t>escalabilidad</a:t>
+            </a:r>
+            <a:r>
+              <a:rPr lang="es-ES" sz="1800" dirty="0"/>
+              <a:t>, </a:t>
+            </a:r>
+            <a:r>
+              <a:rPr lang="es-ES" sz="1800" u="sng" dirty="0"/>
+              <a:t>mantenibilidad</a:t>
+            </a:r>
+            <a:r>
+              <a:rPr lang="es-ES" sz="1800" dirty="0"/>
+              <a:t>, </a:t>
+            </a:r>
+            <a:r>
+              <a:rPr lang="es-ES" sz="1800" u="sng" dirty="0"/>
+              <a:t>codificación UUID</a:t>
+            </a:r>
+            <a:r>
+              <a:rPr lang="es-ES" sz="1800" dirty="0"/>
+              <a:t>.</a:t>
+            </a:r>
+            <a:endParaRPr lang="es-ES" sz="1800" b="1" dirty="0"/>
           </a:p>
         </p:txBody>
       </p:sp>
@@ -20916,7 +20964,7 @@
               <a:rPr lang="en-US" sz="1200" dirty="0">
                 <a:latin typeface="Quattrocento Sans" panose="020B0502050000020003" pitchFamily="34" charset="0"/>
               </a:rPr>
-              <a:t> del 91 % </a:t>
+              <a:t> del 89,8 % </a:t>
             </a:r>
             <a:r>
               <a:rPr lang="en-US" sz="1200" dirty="0" err="1">
@@ -22548,7 +22596,7 @@
                   <a:srgbClr val="FFCD00"/>
                 </a:highlight>
               </a:rPr>
-              <a:t>89.7 %</a:t>
+              <a:t>89.8 %</a:t>
             </a:r>
             <a:endParaRPr sz="9600" dirty="0">
               <a:highlight>
